--- a/docs/pptx/whole/ritu-linsubhr-ratio-hosp5_10pct.pptx
+++ b/docs/pptx/whole/ritu-linsubhr-ratio-hosp5_10pct.pptx
@@ -2443,7 +2443,7 @@
           </p:nvSpPr>
           <p:spPr>
             <a:xfrm>
-              <a:off x="955490" y="2073503"/>
+              <a:off x="957589" y="2073503"/>
               <a:ext cx="0" cy="3649639"/>
             </a:xfrm>
             <a:custGeom>
@@ -2486,7 +2486,7 @@
           </p:nvSpPr>
           <p:spPr>
             <a:xfrm>
-              <a:off x="1892768" y="2073503"/>
+              <a:off x="1893867" y="2073503"/>
               <a:ext cx="0" cy="3649639"/>
             </a:xfrm>
             <a:custGeom>
@@ -2529,7 +2529,7 @@
           </p:nvSpPr>
           <p:spPr>
             <a:xfrm>
-              <a:off x="2830046" y="2073503"/>
+              <a:off x="2830144" y="2073503"/>
               <a:ext cx="0" cy="3649639"/>
             </a:xfrm>
             <a:custGeom>
@@ -2572,7 +2572,7 @@
           </p:nvSpPr>
           <p:spPr>
             <a:xfrm>
-              <a:off x="3767323" y="2073503"/>
+              <a:off x="3766422" y="2073503"/>
               <a:ext cx="0" cy="3649639"/>
             </a:xfrm>
             <a:custGeom>
@@ -2615,7 +2615,7 @@
           </p:nvSpPr>
           <p:spPr>
             <a:xfrm>
-              <a:off x="4704601" y="2073503"/>
+              <a:off x="4702700" y="2073503"/>
               <a:ext cx="0" cy="3649639"/>
             </a:xfrm>
             <a:custGeom>
@@ -2658,7 +2658,7 @@
           </p:nvSpPr>
           <p:spPr>
             <a:xfrm>
-              <a:off x="5641878" y="2073503"/>
+              <a:off x="5638978" y="2073503"/>
               <a:ext cx="0" cy="3649639"/>
             </a:xfrm>
             <a:custGeom>
@@ -2701,7 +2701,7 @@
           </p:nvSpPr>
           <p:spPr>
             <a:xfrm>
-              <a:off x="6579156" y="2073503"/>
+              <a:off x="6575256" y="2073503"/>
               <a:ext cx="0" cy="3649639"/>
             </a:xfrm>
             <a:custGeom>
@@ -2744,7 +2744,7 @@
           </p:nvSpPr>
           <p:spPr>
             <a:xfrm>
-              <a:off x="7516433" y="2073503"/>
+              <a:off x="7511534" y="2073503"/>
               <a:ext cx="0" cy="3649639"/>
             </a:xfrm>
             <a:custGeom>
@@ -2787,7 +2787,7 @@
           </p:nvSpPr>
           <p:spPr>
             <a:xfrm>
-              <a:off x="8453711" y="2073503"/>
+              <a:off x="8447812" y="2073503"/>
               <a:ext cx="0" cy="3649639"/>
             </a:xfrm>
             <a:custGeom>
@@ -3045,7 +3045,7 @@
           </p:nvSpPr>
           <p:spPr>
             <a:xfrm>
-              <a:off x="1424129" y="2073503"/>
+              <a:off x="1425728" y="2073503"/>
               <a:ext cx="0" cy="3649639"/>
             </a:xfrm>
             <a:custGeom>
@@ -3088,7 +3088,7 @@
           </p:nvSpPr>
           <p:spPr>
             <a:xfrm>
-              <a:off x="2361407" y="2073503"/>
+              <a:off x="2362006" y="2073503"/>
               <a:ext cx="0" cy="3649639"/>
             </a:xfrm>
             <a:custGeom>
@@ -3131,7 +3131,7 @@
           </p:nvSpPr>
           <p:spPr>
             <a:xfrm>
-              <a:off x="3298684" y="2073503"/>
+              <a:off x="3298283" y="2073503"/>
               <a:ext cx="0" cy="3649639"/>
             </a:xfrm>
             <a:custGeom>
@@ -3174,7 +3174,7 @@
           </p:nvSpPr>
           <p:spPr>
             <a:xfrm>
-              <a:off x="4235962" y="2073503"/>
+              <a:off x="4234561" y="2073503"/>
               <a:ext cx="0" cy="3649639"/>
             </a:xfrm>
             <a:custGeom>
@@ -3217,7 +3217,7 @@
           </p:nvSpPr>
           <p:spPr>
             <a:xfrm>
-              <a:off x="5173239" y="2073503"/>
+              <a:off x="5170839" y="2073503"/>
               <a:ext cx="0" cy="3649639"/>
             </a:xfrm>
             <a:custGeom>
@@ -3260,7 +3260,7 @@
           </p:nvSpPr>
           <p:spPr>
             <a:xfrm>
-              <a:off x="6110517" y="2073503"/>
+              <a:off x="6107117" y="2073503"/>
               <a:ext cx="0" cy="3649639"/>
             </a:xfrm>
             <a:custGeom>
@@ -3303,7 +3303,7 @@
           </p:nvSpPr>
           <p:spPr>
             <a:xfrm>
-              <a:off x="7047795" y="2073503"/>
+              <a:off x="7043395" y="2073503"/>
               <a:ext cx="0" cy="3649639"/>
             </a:xfrm>
             <a:custGeom>
@@ -3346,7 +3346,7 @@
           </p:nvSpPr>
           <p:spPr>
             <a:xfrm>
-              <a:off x="7985072" y="2073503"/>
+              <a:off x="7979673" y="2073503"/>
               <a:ext cx="0" cy="3649639"/>
             </a:xfrm>
             <a:custGeom>
@@ -3390,395 +3390,461 @@
           <p:spPr>
             <a:xfrm>
               <a:off x="1172049" y="2073503"/>
-              <a:ext cx="7090630" cy="3483745"/>
+              <a:ext cx="7090630" cy="3483723"/>
             </a:xfrm>
             <a:custGeom>
               <a:avLst/>
               <a:pathLst>
-                <a:path w="7090630" h="3483745">
+                <a:path w="7090630" h="3483723">
                   <a:moveTo>
-                    <a:pt x="2716927" y="0"/>
+                    <a:pt x="2602839" y="0"/>
                   </a:moveTo>
                   <a:lnTo>
-                    <a:pt x="2721655" y="61764"/>
-                  </a:lnTo>
-                  <a:lnTo>
-                    <a:pt x="2793278" y="796490"/>
-                  </a:lnTo>
-                  <a:lnTo>
-                    <a:pt x="2864901" y="1373464"/>
-                  </a:lnTo>
-                  <a:lnTo>
-                    <a:pt x="2936523" y="1826558"/>
-                  </a:lnTo>
-                  <a:lnTo>
-                    <a:pt x="3008146" y="2182369"/>
-                  </a:lnTo>
-                  <a:lnTo>
-                    <a:pt x="3079768" y="2461785"/>
-                  </a:lnTo>
-                  <a:lnTo>
-                    <a:pt x="3151391" y="2645409"/>
-                  </a:lnTo>
-                  <a:lnTo>
-                    <a:pt x="3223013" y="2577454"/>
-                  </a:lnTo>
-                  <a:lnTo>
-                    <a:pt x="3294636" y="2503990"/>
-                  </a:lnTo>
-                  <a:lnTo>
-                    <a:pt x="3366258" y="2424572"/>
-                  </a:lnTo>
-                  <a:lnTo>
-                    <a:pt x="3437881" y="2338715"/>
-                  </a:lnTo>
-                  <a:lnTo>
-                    <a:pt x="3509503" y="2245900"/>
-                  </a:lnTo>
-                  <a:lnTo>
-                    <a:pt x="3581126" y="2145560"/>
-                  </a:lnTo>
-                  <a:lnTo>
-                    <a:pt x="3652748" y="2037088"/>
-                  </a:lnTo>
-                  <a:lnTo>
-                    <a:pt x="3724371" y="1919822"/>
-                  </a:lnTo>
-                  <a:lnTo>
-                    <a:pt x="3795993" y="1793051"/>
-                  </a:lnTo>
-                  <a:lnTo>
-                    <a:pt x="3867616" y="1656004"/>
-                  </a:lnTo>
-                  <a:lnTo>
-                    <a:pt x="3939238" y="1507848"/>
-                  </a:lnTo>
-                  <a:lnTo>
-                    <a:pt x="4010861" y="1347683"/>
-                  </a:lnTo>
-                  <a:lnTo>
-                    <a:pt x="4082483" y="1174534"/>
-                  </a:lnTo>
-                  <a:lnTo>
-                    <a:pt x="4154106" y="987351"/>
-                  </a:lnTo>
-                  <a:lnTo>
-                    <a:pt x="4225729" y="784994"/>
-                  </a:lnTo>
-                  <a:lnTo>
-                    <a:pt x="4297351" y="566234"/>
-                  </a:lnTo>
-                  <a:lnTo>
-                    <a:pt x="4368974" y="329742"/>
-                  </a:lnTo>
-                  <a:lnTo>
-                    <a:pt x="4440596" y="74080"/>
-                  </a:lnTo>
-                  <a:lnTo>
-                    <a:pt x="4459793" y="0"/>
+                    <a:pt x="2650033" y="422472"/>
+                  </a:lnTo>
+                  <a:lnTo>
+                    <a:pt x="2721655" y="952595"/>
+                  </a:lnTo>
+                  <a:lnTo>
+                    <a:pt x="2793278" y="1390916"/>
+                  </a:lnTo>
+                  <a:lnTo>
+                    <a:pt x="2864901" y="1753332"/>
+                  </a:lnTo>
+                  <a:lnTo>
+                    <a:pt x="2936523" y="2052989"/>
+                  </a:lnTo>
+                  <a:lnTo>
+                    <a:pt x="3008146" y="2300754"/>
+                  </a:lnTo>
+                  <a:lnTo>
+                    <a:pt x="3079768" y="2505614"/>
+                  </a:lnTo>
+                  <a:lnTo>
+                    <a:pt x="3151391" y="2650310"/>
+                  </a:lnTo>
+                  <a:lnTo>
+                    <a:pt x="3223013" y="2619825"/>
+                  </a:lnTo>
+                  <a:lnTo>
+                    <a:pt x="3294636" y="2588225"/>
+                  </a:lnTo>
+                  <a:lnTo>
+                    <a:pt x="3366258" y="2555468"/>
+                  </a:lnTo>
+                  <a:lnTo>
+                    <a:pt x="3437881" y="2521514"/>
+                  </a:lnTo>
+                  <a:lnTo>
+                    <a:pt x="3509503" y="2486318"/>
+                  </a:lnTo>
+                  <a:lnTo>
+                    <a:pt x="3581126" y="2449834"/>
+                  </a:lnTo>
+                  <a:lnTo>
+                    <a:pt x="3652748" y="2412016"/>
+                  </a:lnTo>
+                  <a:lnTo>
+                    <a:pt x="3724371" y="2372814"/>
+                  </a:lnTo>
+                  <a:lnTo>
+                    <a:pt x="3795993" y="2332179"/>
+                  </a:lnTo>
+                  <a:lnTo>
+                    <a:pt x="3867616" y="2290057"/>
+                  </a:lnTo>
+                  <a:lnTo>
+                    <a:pt x="3939238" y="2246394"/>
+                  </a:lnTo>
+                  <a:lnTo>
+                    <a:pt x="4010861" y="2201135"/>
+                  </a:lnTo>
+                  <a:lnTo>
+                    <a:pt x="4082483" y="2154219"/>
+                  </a:lnTo>
+                  <a:lnTo>
+                    <a:pt x="4154106" y="2105588"/>
+                  </a:lnTo>
+                  <a:lnTo>
+                    <a:pt x="4225729" y="2055178"/>
+                  </a:lnTo>
+                  <a:lnTo>
+                    <a:pt x="4297351" y="2002924"/>
+                  </a:lnTo>
+                  <a:lnTo>
+                    <a:pt x="4368974" y="1948759"/>
+                  </a:lnTo>
+                  <a:lnTo>
+                    <a:pt x="4440596" y="1892613"/>
+                  </a:lnTo>
+                  <a:lnTo>
+                    <a:pt x="4512219" y="1834412"/>
+                  </a:lnTo>
+                  <a:lnTo>
+                    <a:pt x="4583841" y="1774083"/>
+                  </a:lnTo>
+                  <a:lnTo>
+                    <a:pt x="4655464" y="1711548"/>
+                  </a:lnTo>
+                  <a:lnTo>
+                    <a:pt x="4727086" y="1646724"/>
+                  </a:lnTo>
+                  <a:lnTo>
+                    <a:pt x="4798709" y="1579530"/>
+                  </a:lnTo>
+                  <a:lnTo>
+                    <a:pt x="4870331" y="1509878"/>
+                  </a:lnTo>
+                  <a:lnTo>
+                    <a:pt x="4941954" y="1437678"/>
+                  </a:lnTo>
+                  <a:lnTo>
+                    <a:pt x="5013576" y="1362838"/>
+                  </a:lnTo>
+                  <a:lnTo>
+                    <a:pt x="5085199" y="1285259"/>
+                  </a:lnTo>
+                  <a:lnTo>
+                    <a:pt x="5156821" y="1204844"/>
+                  </a:lnTo>
+                  <a:lnTo>
+                    <a:pt x="5228444" y="1121486"/>
+                  </a:lnTo>
+                  <a:lnTo>
+                    <a:pt x="5300066" y="1035080"/>
+                  </a:lnTo>
+                  <a:lnTo>
+                    <a:pt x="5371689" y="945513"/>
+                  </a:lnTo>
+                  <a:lnTo>
+                    <a:pt x="5443311" y="852670"/>
+                  </a:lnTo>
+                  <a:lnTo>
+                    <a:pt x="5514934" y="756431"/>
+                  </a:lnTo>
+                  <a:lnTo>
+                    <a:pt x="5586557" y="656672"/>
+                  </a:lnTo>
+                  <a:lnTo>
+                    <a:pt x="5658179" y="553264"/>
+                  </a:lnTo>
+                  <a:lnTo>
+                    <a:pt x="5729802" y="446073"/>
+                  </a:lnTo>
+                  <a:lnTo>
+                    <a:pt x="5801424" y="334962"/>
+                  </a:lnTo>
+                  <a:lnTo>
+                    <a:pt x="5873047" y="219786"/>
+                  </a:lnTo>
+                  <a:lnTo>
+                    <a:pt x="5944669" y="100397"/>
+                  </a:lnTo>
+                  <a:lnTo>
+                    <a:pt x="6002774" y="0"/>
                   </a:lnTo>
                   <a:lnTo>
                     <a:pt x="7090630" y="0"/>
                   </a:lnTo>
                   <a:lnTo>
-                    <a:pt x="7090630" y="3483745"/>
-                  </a:lnTo>
-                  <a:lnTo>
-                    <a:pt x="7019007" y="3483745"/>
-                  </a:lnTo>
-                  <a:lnTo>
-                    <a:pt x="6947385" y="3483744"/>
-                  </a:lnTo>
-                  <a:lnTo>
-                    <a:pt x="6875762" y="3483744"/>
-                  </a:lnTo>
-                  <a:lnTo>
-                    <a:pt x="6804139" y="3483743"/>
-                  </a:lnTo>
-                  <a:lnTo>
-                    <a:pt x="6732517" y="3483742"/>
-                  </a:lnTo>
-                  <a:lnTo>
-                    <a:pt x="6660894" y="3483741"/>
-                  </a:lnTo>
-                  <a:lnTo>
-                    <a:pt x="6589272" y="3483739"/>
-                  </a:lnTo>
-                  <a:lnTo>
-                    <a:pt x="6517649" y="3483737"/>
-                  </a:lnTo>
-                  <a:lnTo>
-                    <a:pt x="6446027" y="3483734"/>
-                  </a:lnTo>
-                  <a:lnTo>
-                    <a:pt x="6374404" y="3483731"/>
-                  </a:lnTo>
-                  <a:lnTo>
-                    <a:pt x="6302782" y="3483727"/>
-                  </a:lnTo>
-                  <a:lnTo>
-                    <a:pt x="6231159" y="3483722"/>
-                  </a:lnTo>
-                  <a:lnTo>
-                    <a:pt x="6159537" y="3483715"/>
-                  </a:lnTo>
-                  <a:lnTo>
-                    <a:pt x="6087914" y="3483707"/>
-                  </a:lnTo>
-                  <a:lnTo>
-                    <a:pt x="6016292" y="3483696"/>
-                  </a:lnTo>
-                  <a:lnTo>
-                    <a:pt x="5944669" y="3483682"/>
-                  </a:lnTo>
-                  <a:lnTo>
-                    <a:pt x="5873047" y="3483664"/>
-                  </a:lnTo>
-                  <a:lnTo>
-                    <a:pt x="5801424" y="3483642"/>
-                  </a:lnTo>
-                  <a:lnTo>
-                    <a:pt x="5729802" y="3483613"/>
-                  </a:lnTo>
-                  <a:lnTo>
-                    <a:pt x="5658179" y="3483576"/>
-                  </a:lnTo>
-                  <a:lnTo>
-                    <a:pt x="5586557" y="3483530"/>
-                  </a:lnTo>
-                  <a:lnTo>
-                    <a:pt x="5514934" y="3483471"/>
-                  </a:lnTo>
-                  <a:lnTo>
-                    <a:pt x="5443311" y="3483395"/>
-                  </a:lnTo>
-                  <a:lnTo>
-                    <a:pt x="5371689" y="3483299"/>
-                  </a:lnTo>
-                  <a:lnTo>
-                    <a:pt x="5300066" y="3483177"/>
-                  </a:lnTo>
-                  <a:lnTo>
-                    <a:pt x="5228444" y="3483021"/>
-                  </a:lnTo>
-                  <a:lnTo>
-                    <a:pt x="5156821" y="3482823"/>
-                  </a:lnTo>
-                  <a:lnTo>
-                    <a:pt x="5085199" y="3482571"/>
-                  </a:lnTo>
-                  <a:lnTo>
-                    <a:pt x="5013576" y="3482249"/>
-                  </a:lnTo>
-                  <a:lnTo>
-                    <a:pt x="4941954" y="3481840"/>
-                  </a:lnTo>
-                  <a:lnTo>
-                    <a:pt x="4870331" y="3481319"/>
-                  </a:lnTo>
-                  <a:lnTo>
-                    <a:pt x="4798709" y="3480655"/>
-                  </a:lnTo>
-                  <a:lnTo>
-                    <a:pt x="4727086" y="3479809"/>
-                  </a:lnTo>
-                  <a:lnTo>
-                    <a:pt x="4655464" y="3478733"/>
-                  </a:lnTo>
-                  <a:lnTo>
-                    <a:pt x="4583841" y="3477362"/>
-                  </a:lnTo>
-                  <a:lnTo>
-                    <a:pt x="4512219" y="3475617"/>
-                  </a:lnTo>
-                  <a:lnTo>
-                    <a:pt x="4440596" y="3473394"/>
-                  </a:lnTo>
-                  <a:lnTo>
-                    <a:pt x="4368974" y="3470564"/>
-                  </a:lnTo>
-                  <a:lnTo>
-                    <a:pt x="4297351" y="3466960"/>
-                  </a:lnTo>
-                  <a:lnTo>
-                    <a:pt x="4225729" y="3462370"/>
-                  </a:lnTo>
-                  <a:lnTo>
-                    <a:pt x="4154106" y="3456525"/>
-                  </a:lnTo>
-                  <a:lnTo>
-                    <a:pt x="4082483" y="3449083"/>
-                  </a:lnTo>
-                  <a:lnTo>
-                    <a:pt x="4010861" y="3439605"/>
-                  </a:lnTo>
-                  <a:lnTo>
-                    <a:pt x="3939238" y="3427537"/>
-                  </a:lnTo>
-                  <a:lnTo>
-                    <a:pt x="3867616" y="3412168"/>
-                  </a:lnTo>
-                  <a:lnTo>
-                    <a:pt x="3795993" y="3392598"/>
-                  </a:lnTo>
-                  <a:lnTo>
-                    <a:pt x="3724371" y="3367677"/>
-                  </a:lnTo>
-                  <a:lnTo>
-                    <a:pt x="3652748" y="3335943"/>
-                  </a:lnTo>
-                  <a:lnTo>
-                    <a:pt x="3581126" y="3295532"/>
-                  </a:lnTo>
-                  <a:lnTo>
-                    <a:pt x="3509503" y="3244071"/>
-                  </a:lnTo>
-                  <a:lnTo>
-                    <a:pt x="3437881" y="3178542"/>
-                  </a:lnTo>
-                  <a:lnTo>
-                    <a:pt x="3366258" y="3095095"/>
-                  </a:lnTo>
-                  <a:lnTo>
-                    <a:pt x="3294636" y="2988834"/>
-                  </a:lnTo>
-                  <a:lnTo>
-                    <a:pt x="3223013" y="2853519"/>
-                  </a:lnTo>
-                  <a:lnTo>
-                    <a:pt x="3151391" y="2681208"/>
-                  </a:lnTo>
-                  <a:lnTo>
-                    <a:pt x="3079768" y="2708269"/>
-                  </a:lnTo>
-                  <a:lnTo>
-                    <a:pt x="3008146" y="2766415"/>
-                  </a:lnTo>
-                  <a:lnTo>
-                    <a:pt x="2936523" y="2820202"/>
-                  </a:lnTo>
-                  <a:lnTo>
-                    <a:pt x="2864901" y="2869956"/>
-                  </a:lnTo>
-                  <a:lnTo>
-                    <a:pt x="2793278" y="2915979"/>
-                  </a:lnTo>
-                  <a:lnTo>
-                    <a:pt x="2721655" y="2958551"/>
-                  </a:lnTo>
-                  <a:lnTo>
-                    <a:pt x="2650033" y="2997931"/>
-                  </a:lnTo>
-                  <a:lnTo>
-                    <a:pt x="2578410" y="3034358"/>
-                  </a:lnTo>
-                  <a:lnTo>
-                    <a:pt x="2506788" y="3068054"/>
-                  </a:lnTo>
-                  <a:lnTo>
-                    <a:pt x="2435165" y="3099223"/>
-                  </a:lnTo>
-                  <a:lnTo>
-                    <a:pt x="2363543" y="3128055"/>
-                  </a:lnTo>
-                  <a:lnTo>
-                    <a:pt x="2291920" y="3154726"/>
-                  </a:lnTo>
-                  <a:lnTo>
-                    <a:pt x="2220298" y="3179396"/>
-                  </a:lnTo>
-                  <a:lnTo>
-                    <a:pt x="2148675" y="3202217"/>
-                  </a:lnTo>
-                  <a:lnTo>
-                    <a:pt x="2077053" y="3223326"/>
-                  </a:lnTo>
-                  <a:lnTo>
-                    <a:pt x="2005430" y="3242853"/>
-                  </a:lnTo>
-                  <a:lnTo>
-                    <a:pt x="1933808" y="3260916"/>
-                  </a:lnTo>
-                  <a:lnTo>
-                    <a:pt x="1862185" y="3277624"/>
-                  </a:lnTo>
-                  <a:lnTo>
-                    <a:pt x="1790563" y="3293079"/>
-                  </a:lnTo>
-                  <a:lnTo>
-                    <a:pt x="1718940" y="3307376"/>
-                  </a:lnTo>
-                  <a:lnTo>
-                    <a:pt x="1647318" y="3320600"/>
-                  </a:lnTo>
-                  <a:lnTo>
-                    <a:pt x="1575695" y="3332833"/>
-                  </a:lnTo>
-                  <a:lnTo>
-                    <a:pt x="1504073" y="3344149"/>
-                  </a:lnTo>
-                  <a:lnTo>
-                    <a:pt x="1432450" y="3354616"/>
-                  </a:lnTo>
-                  <a:lnTo>
-                    <a:pt x="1360827" y="3364299"/>
-                  </a:lnTo>
-                  <a:lnTo>
-                    <a:pt x="1289205" y="3373255"/>
-                  </a:lnTo>
-                  <a:lnTo>
-                    <a:pt x="1217582" y="3381540"/>
-                  </a:lnTo>
-                  <a:lnTo>
-                    <a:pt x="1145960" y="3389203"/>
-                  </a:lnTo>
-                  <a:lnTo>
-                    <a:pt x="1074337" y="3396292"/>
-                  </a:lnTo>
-                  <a:lnTo>
-                    <a:pt x="1002715" y="3402850"/>
-                  </a:lnTo>
-                  <a:lnTo>
-                    <a:pt x="931092" y="3408916"/>
-                  </a:lnTo>
-                  <a:lnTo>
-                    <a:pt x="859470" y="3414526"/>
-                  </a:lnTo>
-                  <a:lnTo>
-                    <a:pt x="787847" y="3419717"/>
-                  </a:lnTo>
-                  <a:lnTo>
-                    <a:pt x="716225" y="3424518"/>
-                  </a:lnTo>
-                  <a:lnTo>
-                    <a:pt x="644602" y="3428959"/>
-                  </a:lnTo>
-                  <a:lnTo>
-                    <a:pt x="572980" y="3433067"/>
-                  </a:lnTo>
-                  <a:lnTo>
-                    <a:pt x="501357" y="3436867"/>
-                  </a:lnTo>
-                  <a:lnTo>
-                    <a:pt x="429735" y="3440382"/>
-                  </a:lnTo>
-                  <a:lnTo>
-                    <a:pt x="358112" y="3443634"/>
-                  </a:lnTo>
-                  <a:lnTo>
-                    <a:pt x="286490" y="3446641"/>
-                  </a:lnTo>
-                  <a:lnTo>
-                    <a:pt x="214867" y="3449423"/>
-                  </a:lnTo>
-                  <a:lnTo>
-                    <a:pt x="143245" y="3451997"/>
-                  </a:lnTo>
-                  <a:lnTo>
-                    <a:pt x="71622" y="3454378"/>
-                  </a:lnTo>
-                  <a:lnTo>
-                    <a:pt x="0" y="3456580"/>
+                    <a:pt x="7090630" y="3483723"/>
+                  </a:lnTo>
+                  <a:lnTo>
+                    <a:pt x="7019007" y="3483718"/>
+                  </a:lnTo>
+                  <a:lnTo>
+                    <a:pt x="6947385" y="3483712"/>
+                  </a:lnTo>
+                  <a:lnTo>
+                    <a:pt x="6875762" y="3483705"/>
+                  </a:lnTo>
+                  <a:lnTo>
+                    <a:pt x="6804139" y="3483697"/>
+                  </a:lnTo>
+                  <a:lnTo>
+                    <a:pt x="6732517" y="3483686"/>
+                  </a:lnTo>
+                  <a:lnTo>
+                    <a:pt x="6660894" y="3483674"/>
+                  </a:lnTo>
+                  <a:lnTo>
+                    <a:pt x="6589272" y="3483659"/>
+                  </a:lnTo>
+                  <a:lnTo>
+                    <a:pt x="6517649" y="3483640"/>
+                  </a:lnTo>
+                  <a:lnTo>
+                    <a:pt x="6446027" y="3483618"/>
+                  </a:lnTo>
+                  <a:lnTo>
+                    <a:pt x="6374404" y="3483591"/>
+                  </a:lnTo>
+                  <a:lnTo>
+                    <a:pt x="6302782" y="3483558"/>
+                  </a:lnTo>
+                  <a:lnTo>
+                    <a:pt x="6231159" y="3483519"/>
+                  </a:lnTo>
+                  <a:lnTo>
+                    <a:pt x="6159537" y="3483471"/>
+                  </a:lnTo>
+                  <a:lnTo>
+                    <a:pt x="6087914" y="3483414"/>
+                  </a:lnTo>
+                  <a:lnTo>
+                    <a:pt x="6016292" y="3483344"/>
+                  </a:lnTo>
+                  <a:lnTo>
+                    <a:pt x="5944669" y="3483260"/>
+                  </a:lnTo>
+                  <a:lnTo>
+                    <a:pt x="5873047" y="3483158"/>
+                  </a:lnTo>
+                  <a:lnTo>
+                    <a:pt x="5801424" y="3483035"/>
+                  </a:lnTo>
+                  <a:lnTo>
+                    <a:pt x="5729802" y="3482886"/>
+                  </a:lnTo>
+                  <a:lnTo>
+                    <a:pt x="5658179" y="3482706"/>
+                  </a:lnTo>
+                  <a:lnTo>
+                    <a:pt x="5586557" y="3482488"/>
+                  </a:lnTo>
+                  <a:lnTo>
+                    <a:pt x="5514934" y="3482224"/>
+                  </a:lnTo>
+                  <a:lnTo>
+                    <a:pt x="5443311" y="3481905"/>
+                  </a:lnTo>
+                  <a:lnTo>
+                    <a:pt x="5371689" y="3481519"/>
+                  </a:lnTo>
+                  <a:lnTo>
+                    <a:pt x="5300066" y="3481053"/>
+                  </a:lnTo>
+                  <a:lnTo>
+                    <a:pt x="5228444" y="3480489"/>
+                  </a:lnTo>
+                  <a:lnTo>
+                    <a:pt x="5156821" y="3479807"/>
+                  </a:lnTo>
+                  <a:lnTo>
+                    <a:pt x="5085199" y="3478982"/>
+                  </a:lnTo>
+                  <a:lnTo>
+                    <a:pt x="5013576" y="3477984"/>
+                  </a:lnTo>
+                  <a:lnTo>
+                    <a:pt x="4941954" y="3476777"/>
+                  </a:lnTo>
+                  <a:lnTo>
+                    <a:pt x="4870331" y="3475317"/>
+                  </a:lnTo>
+                  <a:lnTo>
+                    <a:pt x="4798709" y="3473552"/>
+                  </a:lnTo>
+                  <a:lnTo>
+                    <a:pt x="4727086" y="3471416"/>
+                  </a:lnTo>
+                  <a:lnTo>
+                    <a:pt x="4655464" y="3468834"/>
+                  </a:lnTo>
+                  <a:lnTo>
+                    <a:pt x="4583841" y="3465711"/>
+                  </a:lnTo>
+                  <a:lnTo>
+                    <a:pt x="4512219" y="3461933"/>
+                  </a:lnTo>
+                  <a:lnTo>
+                    <a:pt x="4440596" y="3457365"/>
+                  </a:lnTo>
+                  <a:lnTo>
+                    <a:pt x="4368974" y="3451840"/>
+                  </a:lnTo>
+                  <a:lnTo>
+                    <a:pt x="4297351" y="3445157"/>
+                  </a:lnTo>
+                  <a:lnTo>
+                    <a:pt x="4225729" y="3437075"/>
+                  </a:lnTo>
+                  <a:lnTo>
+                    <a:pt x="4154106" y="3427300"/>
+                  </a:lnTo>
+                  <a:lnTo>
+                    <a:pt x="4082483" y="3415478"/>
+                  </a:lnTo>
+                  <a:lnTo>
+                    <a:pt x="4010861" y="3401180"/>
+                  </a:lnTo>
+                  <a:lnTo>
+                    <a:pt x="3939238" y="3383887"/>
+                  </a:lnTo>
+                  <a:lnTo>
+                    <a:pt x="3867616" y="3362973"/>
+                  </a:lnTo>
+                  <a:lnTo>
+                    <a:pt x="3795993" y="3337678"/>
+                  </a:lnTo>
+                  <a:lnTo>
+                    <a:pt x="3724371" y="3307085"/>
+                  </a:lnTo>
+                  <a:lnTo>
+                    <a:pt x="3652748" y="3270085"/>
+                  </a:lnTo>
+                  <a:lnTo>
+                    <a:pt x="3581126" y="3225336"/>
+                  </a:lnTo>
+                  <a:lnTo>
+                    <a:pt x="3509503" y="3171215"/>
+                  </a:lnTo>
+                  <a:lnTo>
+                    <a:pt x="3437881" y="3105759"/>
+                  </a:lnTo>
+                  <a:lnTo>
+                    <a:pt x="3366258" y="3026594"/>
+                  </a:lnTo>
+                  <a:lnTo>
+                    <a:pt x="3294636" y="2930848"/>
+                  </a:lnTo>
+                  <a:lnTo>
+                    <a:pt x="3223013" y="2815049"/>
+                  </a:lnTo>
+                  <a:lnTo>
+                    <a:pt x="3151391" y="2674998"/>
+                  </a:lnTo>
+                  <a:lnTo>
+                    <a:pt x="3079768" y="2679720"/>
+                  </a:lnTo>
+                  <a:lnTo>
+                    <a:pt x="3008146" y="2708092"/>
+                  </a:lnTo>
+                  <a:lnTo>
+                    <a:pt x="2936523" y="2735462"/>
+                  </a:lnTo>
+                  <a:lnTo>
+                    <a:pt x="2864901" y="2761867"/>
+                  </a:lnTo>
+                  <a:lnTo>
+                    <a:pt x="2793278" y="2787340"/>
+                  </a:lnTo>
+                  <a:lnTo>
+                    <a:pt x="2721655" y="2811914"/>
+                  </a:lnTo>
+                  <a:lnTo>
+                    <a:pt x="2650033" y="2835621"/>
+                  </a:lnTo>
+                  <a:lnTo>
+                    <a:pt x="2578410" y="2858492"/>
+                  </a:lnTo>
+                  <a:lnTo>
+                    <a:pt x="2506788" y="2880555"/>
+                  </a:lnTo>
+                  <a:lnTo>
+                    <a:pt x="2435165" y="2901840"/>
+                  </a:lnTo>
+                  <a:lnTo>
+                    <a:pt x="2363543" y="2922374"/>
+                  </a:lnTo>
+                  <a:lnTo>
+                    <a:pt x="2291920" y="2942183"/>
+                  </a:lnTo>
+                  <a:lnTo>
+                    <a:pt x="2220298" y="2961293"/>
+                  </a:lnTo>
+                  <a:lnTo>
+                    <a:pt x="2148675" y="2979729"/>
+                  </a:lnTo>
+                  <a:lnTo>
+                    <a:pt x="2077053" y="2997514"/>
+                  </a:lnTo>
+                  <a:lnTo>
+                    <a:pt x="2005430" y="3014672"/>
+                  </a:lnTo>
+                  <a:lnTo>
+                    <a:pt x="1933808" y="3031224"/>
+                  </a:lnTo>
+                  <a:lnTo>
+                    <a:pt x="1862185" y="3047192"/>
+                  </a:lnTo>
+                  <a:lnTo>
+                    <a:pt x="1790563" y="3062597"/>
+                  </a:lnTo>
+                  <a:lnTo>
+                    <a:pt x="1718940" y="3077458"/>
+                  </a:lnTo>
+                  <a:lnTo>
+                    <a:pt x="1647318" y="3091795"/>
+                  </a:lnTo>
+                  <a:lnTo>
+                    <a:pt x="1575695" y="3105626"/>
+                  </a:lnTo>
+                  <a:lnTo>
+                    <a:pt x="1504073" y="3118969"/>
+                  </a:lnTo>
+                  <a:lnTo>
+                    <a:pt x="1432450" y="3131841"/>
+                  </a:lnTo>
+                  <a:lnTo>
+                    <a:pt x="1360827" y="3144258"/>
+                  </a:lnTo>
+                  <a:lnTo>
+                    <a:pt x="1289205" y="3156238"/>
+                  </a:lnTo>
+                  <a:lnTo>
+                    <a:pt x="1217582" y="3167795"/>
+                  </a:lnTo>
+                  <a:lnTo>
+                    <a:pt x="1145960" y="3178944"/>
+                  </a:lnTo>
+                  <a:lnTo>
+                    <a:pt x="1074337" y="3189699"/>
+                  </a:lnTo>
+                  <a:lnTo>
+                    <a:pt x="1002715" y="3200075"/>
+                  </a:lnTo>
+                  <a:lnTo>
+                    <a:pt x="931092" y="3210085"/>
+                  </a:lnTo>
+                  <a:lnTo>
+                    <a:pt x="859470" y="3219742"/>
+                  </a:lnTo>
+                  <a:lnTo>
+                    <a:pt x="787847" y="3229058"/>
+                  </a:lnTo>
+                  <a:lnTo>
+                    <a:pt x="716225" y="3238045"/>
+                  </a:lnTo>
+                  <a:lnTo>
+                    <a:pt x="644602" y="3246715"/>
+                  </a:lnTo>
+                  <a:lnTo>
+                    <a:pt x="572980" y="3255079"/>
+                  </a:lnTo>
+                  <a:lnTo>
+                    <a:pt x="501357" y="3263148"/>
+                  </a:lnTo>
+                  <a:lnTo>
+                    <a:pt x="429735" y="3270933"/>
+                  </a:lnTo>
+                  <a:lnTo>
+                    <a:pt x="358112" y="3278442"/>
+                  </a:lnTo>
+                  <a:lnTo>
+                    <a:pt x="286490" y="3285687"/>
+                  </a:lnTo>
+                  <a:lnTo>
+                    <a:pt x="214867" y="3292676"/>
+                  </a:lnTo>
+                  <a:lnTo>
+                    <a:pt x="143245" y="3299418"/>
+                  </a:lnTo>
+                  <a:lnTo>
+                    <a:pt x="71622" y="3305922"/>
+                  </a:lnTo>
+                  <a:lnTo>
+                    <a:pt x="0" y="3312197"/>
                   </a:lnTo>
                   <a:lnTo>
                     <a:pt x="0" y="0"/>
@@ -3807,93 +3873,159 @@
           </p:nvSpPr>
           <p:spPr>
             <a:xfrm>
-              <a:off x="3888977" y="2073503"/>
-              <a:ext cx="1742865" cy="2645409"/>
+              <a:off x="3774888" y="2073503"/>
+              <a:ext cx="3399934" cy="2650310"/>
             </a:xfrm>
             <a:custGeom>
               <a:avLst/>
               <a:pathLst>
-                <a:path w="1742865" h="2645409">
+                <a:path w="3399934" h="2650310">
                   <a:moveTo>
                     <a:pt x="0" y="0"/>
                   </a:moveTo>
                   <a:lnTo>
-                    <a:pt x="4728" y="61764"/>
-                  </a:lnTo>
-                  <a:lnTo>
-                    <a:pt x="76350" y="796490"/>
-                  </a:lnTo>
-                  <a:lnTo>
-                    <a:pt x="147973" y="1373464"/>
-                  </a:lnTo>
-                  <a:lnTo>
-                    <a:pt x="219595" y="1826558"/>
-                  </a:lnTo>
-                  <a:lnTo>
-                    <a:pt x="291218" y="2182369"/>
-                  </a:lnTo>
-                  <a:lnTo>
-                    <a:pt x="362840" y="2461785"/>
-                  </a:lnTo>
-                  <a:lnTo>
-                    <a:pt x="434463" y="2645409"/>
-                  </a:lnTo>
-                  <a:lnTo>
-                    <a:pt x="506085" y="2577454"/>
-                  </a:lnTo>
-                  <a:lnTo>
-                    <a:pt x="577708" y="2503990"/>
-                  </a:lnTo>
-                  <a:lnTo>
-                    <a:pt x="649330" y="2424572"/>
-                  </a:lnTo>
-                  <a:lnTo>
-                    <a:pt x="720953" y="2338715"/>
-                  </a:lnTo>
-                  <a:lnTo>
-                    <a:pt x="792575" y="2245900"/>
-                  </a:lnTo>
-                  <a:lnTo>
-                    <a:pt x="864198" y="2145560"/>
-                  </a:lnTo>
-                  <a:lnTo>
-                    <a:pt x="935820" y="2037088"/>
-                  </a:lnTo>
-                  <a:lnTo>
-                    <a:pt x="1007443" y="1919822"/>
-                  </a:lnTo>
-                  <a:lnTo>
-                    <a:pt x="1079066" y="1793051"/>
-                  </a:lnTo>
-                  <a:lnTo>
-                    <a:pt x="1150688" y="1656004"/>
-                  </a:lnTo>
-                  <a:lnTo>
-                    <a:pt x="1222311" y="1507848"/>
-                  </a:lnTo>
-                  <a:lnTo>
-                    <a:pt x="1293933" y="1347683"/>
-                  </a:lnTo>
-                  <a:lnTo>
-                    <a:pt x="1365556" y="1174534"/>
-                  </a:lnTo>
-                  <a:lnTo>
-                    <a:pt x="1437178" y="987351"/>
-                  </a:lnTo>
-                  <a:lnTo>
-                    <a:pt x="1508801" y="784994"/>
-                  </a:lnTo>
-                  <a:lnTo>
-                    <a:pt x="1580423" y="566234"/>
-                  </a:lnTo>
-                  <a:lnTo>
-                    <a:pt x="1652046" y="329742"/>
-                  </a:lnTo>
-                  <a:lnTo>
-                    <a:pt x="1723668" y="74080"/>
-                  </a:lnTo>
-                  <a:lnTo>
-                    <a:pt x="1742865" y="0"/>
+                    <a:pt x="47194" y="422472"/>
+                  </a:lnTo>
+                  <a:lnTo>
+                    <a:pt x="118816" y="952595"/>
+                  </a:lnTo>
+                  <a:lnTo>
+                    <a:pt x="190439" y="1390916"/>
+                  </a:lnTo>
+                  <a:lnTo>
+                    <a:pt x="262061" y="1753332"/>
+                  </a:lnTo>
+                  <a:lnTo>
+                    <a:pt x="333684" y="2052989"/>
+                  </a:lnTo>
+                  <a:lnTo>
+                    <a:pt x="405306" y="2300754"/>
+                  </a:lnTo>
+                  <a:lnTo>
+                    <a:pt x="476929" y="2505614"/>
+                  </a:lnTo>
+                  <a:lnTo>
+                    <a:pt x="548551" y="2650310"/>
+                  </a:lnTo>
+                  <a:lnTo>
+                    <a:pt x="620174" y="2619825"/>
+                  </a:lnTo>
+                  <a:lnTo>
+                    <a:pt x="691796" y="2588225"/>
+                  </a:lnTo>
+                  <a:lnTo>
+                    <a:pt x="763419" y="2555468"/>
+                  </a:lnTo>
+                  <a:lnTo>
+                    <a:pt x="835041" y="2521514"/>
+                  </a:lnTo>
+                  <a:lnTo>
+                    <a:pt x="906664" y="2486318"/>
+                  </a:lnTo>
+                  <a:lnTo>
+                    <a:pt x="978286" y="2449834"/>
+                  </a:lnTo>
+                  <a:lnTo>
+                    <a:pt x="1049909" y="2412016"/>
+                  </a:lnTo>
+                  <a:lnTo>
+                    <a:pt x="1121531" y="2372814"/>
+                  </a:lnTo>
+                  <a:lnTo>
+                    <a:pt x="1193154" y="2332179"/>
+                  </a:lnTo>
+                  <a:lnTo>
+                    <a:pt x="1264777" y="2290057"/>
+                  </a:lnTo>
+                  <a:lnTo>
+                    <a:pt x="1336399" y="2246394"/>
+                  </a:lnTo>
+                  <a:lnTo>
+                    <a:pt x="1408022" y="2201135"/>
+                  </a:lnTo>
+                  <a:lnTo>
+                    <a:pt x="1479644" y="2154219"/>
+                  </a:lnTo>
+                  <a:lnTo>
+                    <a:pt x="1551267" y="2105588"/>
+                  </a:lnTo>
+                  <a:lnTo>
+                    <a:pt x="1622889" y="2055178"/>
+                  </a:lnTo>
+                  <a:lnTo>
+                    <a:pt x="1694512" y="2002924"/>
+                  </a:lnTo>
+                  <a:lnTo>
+                    <a:pt x="1766134" y="1948759"/>
+                  </a:lnTo>
+                  <a:lnTo>
+                    <a:pt x="1837757" y="1892613"/>
+                  </a:lnTo>
+                  <a:lnTo>
+                    <a:pt x="1909379" y="1834412"/>
+                  </a:lnTo>
+                  <a:lnTo>
+                    <a:pt x="1981002" y="1774083"/>
+                  </a:lnTo>
+                  <a:lnTo>
+                    <a:pt x="2052624" y="1711548"/>
+                  </a:lnTo>
+                  <a:lnTo>
+                    <a:pt x="2124247" y="1646724"/>
+                  </a:lnTo>
+                  <a:lnTo>
+                    <a:pt x="2195869" y="1579530"/>
+                  </a:lnTo>
+                  <a:lnTo>
+                    <a:pt x="2267492" y="1509878"/>
+                  </a:lnTo>
+                  <a:lnTo>
+                    <a:pt x="2339114" y="1437678"/>
+                  </a:lnTo>
+                  <a:lnTo>
+                    <a:pt x="2410737" y="1362838"/>
+                  </a:lnTo>
+                  <a:lnTo>
+                    <a:pt x="2482359" y="1285259"/>
+                  </a:lnTo>
+                  <a:lnTo>
+                    <a:pt x="2553982" y="1204844"/>
+                  </a:lnTo>
+                  <a:lnTo>
+                    <a:pt x="2625605" y="1121486"/>
+                  </a:lnTo>
+                  <a:lnTo>
+                    <a:pt x="2697227" y="1035080"/>
+                  </a:lnTo>
+                  <a:lnTo>
+                    <a:pt x="2768850" y="945513"/>
+                  </a:lnTo>
+                  <a:lnTo>
+                    <a:pt x="2840472" y="852670"/>
+                  </a:lnTo>
+                  <a:lnTo>
+                    <a:pt x="2912095" y="756431"/>
+                  </a:lnTo>
+                  <a:lnTo>
+                    <a:pt x="2983717" y="656672"/>
+                  </a:lnTo>
+                  <a:lnTo>
+                    <a:pt x="3055340" y="553264"/>
+                  </a:lnTo>
+                  <a:lnTo>
+                    <a:pt x="3126962" y="446073"/>
+                  </a:lnTo>
+                  <a:lnTo>
+                    <a:pt x="3198585" y="334962"/>
+                  </a:lnTo>
+                  <a:lnTo>
+                    <a:pt x="3270207" y="219786"/>
+                  </a:lnTo>
+                  <a:lnTo>
+                    <a:pt x="3341830" y="100397"/>
+                  </a:lnTo>
+                  <a:lnTo>
+                    <a:pt x="3399934" y="0"/>
                   </a:lnTo>
                 </a:path>
               </a:pathLst>
@@ -3913,312 +4045,312 @@
           </p:nvSpPr>
           <p:spPr>
             <a:xfrm>
-              <a:off x="1172049" y="4754711"/>
-              <a:ext cx="7090630" cy="802537"/>
+              <a:off x="1172049" y="4748501"/>
+              <a:ext cx="7090630" cy="808725"/>
             </a:xfrm>
             <a:custGeom>
               <a:avLst/>
               <a:pathLst>
-                <a:path w="7090630" h="802537">
+                <a:path w="7090630" h="808725">
                   <a:moveTo>
-                    <a:pt x="7090630" y="802537"/>
+                    <a:pt x="7090630" y="808725"/>
                   </a:moveTo>
                   <a:lnTo>
-                    <a:pt x="7019007" y="802536"/>
-                  </a:lnTo>
-                  <a:lnTo>
-                    <a:pt x="6947385" y="802536"/>
-                  </a:lnTo>
-                  <a:lnTo>
-                    <a:pt x="6875762" y="802535"/>
-                  </a:lnTo>
-                  <a:lnTo>
-                    <a:pt x="6804139" y="802535"/>
-                  </a:lnTo>
-                  <a:lnTo>
-                    <a:pt x="6732517" y="802534"/>
-                  </a:lnTo>
-                  <a:lnTo>
-                    <a:pt x="6660894" y="802532"/>
-                  </a:lnTo>
-                  <a:lnTo>
-                    <a:pt x="6589272" y="802531"/>
-                  </a:lnTo>
-                  <a:lnTo>
-                    <a:pt x="6517649" y="802529"/>
-                  </a:lnTo>
-                  <a:lnTo>
-                    <a:pt x="6446027" y="802526"/>
-                  </a:lnTo>
-                  <a:lnTo>
-                    <a:pt x="6374404" y="802523"/>
-                  </a:lnTo>
-                  <a:lnTo>
-                    <a:pt x="6302782" y="802519"/>
-                  </a:lnTo>
-                  <a:lnTo>
-                    <a:pt x="6231159" y="802513"/>
-                  </a:lnTo>
-                  <a:lnTo>
-                    <a:pt x="6159537" y="802507"/>
-                  </a:lnTo>
-                  <a:lnTo>
-                    <a:pt x="6087914" y="802498"/>
-                  </a:lnTo>
-                  <a:lnTo>
-                    <a:pt x="6016292" y="802487"/>
-                  </a:lnTo>
-                  <a:lnTo>
-                    <a:pt x="5944669" y="802473"/>
-                  </a:lnTo>
-                  <a:lnTo>
-                    <a:pt x="5873047" y="802456"/>
-                  </a:lnTo>
-                  <a:lnTo>
-                    <a:pt x="5801424" y="802433"/>
-                  </a:lnTo>
-                  <a:lnTo>
-                    <a:pt x="5729802" y="802405"/>
-                  </a:lnTo>
-                  <a:lnTo>
-                    <a:pt x="5658179" y="802368"/>
-                  </a:lnTo>
-                  <a:lnTo>
-                    <a:pt x="5586557" y="802322"/>
-                  </a:lnTo>
-                  <a:lnTo>
-                    <a:pt x="5514934" y="802262"/>
-                  </a:lnTo>
-                  <a:lnTo>
-                    <a:pt x="5443311" y="802187"/>
-                  </a:lnTo>
-                  <a:lnTo>
-                    <a:pt x="5371689" y="802091"/>
-                  </a:lnTo>
-                  <a:lnTo>
-                    <a:pt x="5300066" y="801969"/>
-                  </a:lnTo>
-                  <a:lnTo>
-                    <a:pt x="5228444" y="801813"/>
-                  </a:lnTo>
-                  <a:lnTo>
-                    <a:pt x="5156821" y="801615"/>
-                  </a:lnTo>
-                  <a:lnTo>
-                    <a:pt x="5085199" y="801362"/>
-                  </a:lnTo>
-                  <a:lnTo>
-                    <a:pt x="5013576" y="801041"/>
-                  </a:lnTo>
-                  <a:lnTo>
-                    <a:pt x="4941954" y="800632"/>
-                  </a:lnTo>
-                  <a:lnTo>
-                    <a:pt x="4870331" y="800110"/>
-                  </a:lnTo>
-                  <a:lnTo>
-                    <a:pt x="4798709" y="799446"/>
-                  </a:lnTo>
-                  <a:lnTo>
-                    <a:pt x="4727086" y="798601"/>
-                  </a:lnTo>
-                  <a:lnTo>
-                    <a:pt x="4655464" y="797525"/>
-                  </a:lnTo>
-                  <a:lnTo>
-                    <a:pt x="4583841" y="796154"/>
-                  </a:lnTo>
-                  <a:lnTo>
-                    <a:pt x="4512219" y="794409"/>
-                  </a:lnTo>
-                  <a:lnTo>
-                    <a:pt x="4440596" y="792186"/>
-                  </a:lnTo>
-                  <a:lnTo>
-                    <a:pt x="4368974" y="789356"/>
-                  </a:lnTo>
-                  <a:lnTo>
-                    <a:pt x="4297351" y="785751"/>
-                  </a:lnTo>
-                  <a:lnTo>
-                    <a:pt x="4225729" y="781162"/>
-                  </a:lnTo>
-                  <a:lnTo>
-                    <a:pt x="4154106" y="775317"/>
-                  </a:lnTo>
-                  <a:lnTo>
-                    <a:pt x="4082483" y="767875"/>
-                  </a:lnTo>
-                  <a:lnTo>
-                    <a:pt x="4010861" y="758397"/>
-                  </a:lnTo>
-                  <a:lnTo>
-                    <a:pt x="3939238" y="746328"/>
-                  </a:lnTo>
-                  <a:lnTo>
-                    <a:pt x="3867616" y="730960"/>
-                  </a:lnTo>
-                  <a:lnTo>
-                    <a:pt x="3795993" y="711390"/>
-                  </a:lnTo>
-                  <a:lnTo>
-                    <a:pt x="3724371" y="686469"/>
-                  </a:lnTo>
-                  <a:lnTo>
-                    <a:pt x="3652748" y="654734"/>
-                  </a:lnTo>
-                  <a:lnTo>
-                    <a:pt x="3581126" y="614323"/>
-                  </a:lnTo>
-                  <a:lnTo>
-                    <a:pt x="3509503" y="562863"/>
-                  </a:lnTo>
-                  <a:lnTo>
-                    <a:pt x="3437881" y="497333"/>
-                  </a:lnTo>
-                  <a:lnTo>
-                    <a:pt x="3366258" y="413887"/>
-                  </a:lnTo>
-                  <a:lnTo>
-                    <a:pt x="3294636" y="307625"/>
-                  </a:lnTo>
-                  <a:lnTo>
-                    <a:pt x="3223013" y="172311"/>
+                    <a:pt x="7019007" y="808720"/>
+                  </a:lnTo>
+                  <a:lnTo>
+                    <a:pt x="6947385" y="808714"/>
+                  </a:lnTo>
+                  <a:lnTo>
+                    <a:pt x="6875762" y="808707"/>
+                  </a:lnTo>
+                  <a:lnTo>
+                    <a:pt x="6804139" y="808699"/>
+                  </a:lnTo>
+                  <a:lnTo>
+                    <a:pt x="6732517" y="808688"/>
+                  </a:lnTo>
+                  <a:lnTo>
+                    <a:pt x="6660894" y="808676"/>
+                  </a:lnTo>
+                  <a:lnTo>
+                    <a:pt x="6589272" y="808661"/>
+                  </a:lnTo>
+                  <a:lnTo>
+                    <a:pt x="6517649" y="808642"/>
+                  </a:lnTo>
+                  <a:lnTo>
+                    <a:pt x="6446027" y="808620"/>
+                  </a:lnTo>
+                  <a:lnTo>
+                    <a:pt x="6374404" y="808593"/>
+                  </a:lnTo>
+                  <a:lnTo>
+                    <a:pt x="6302782" y="808560"/>
+                  </a:lnTo>
+                  <a:lnTo>
+                    <a:pt x="6231159" y="808521"/>
+                  </a:lnTo>
+                  <a:lnTo>
+                    <a:pt x="6159537" y="808473"/>
+                  </a:lnTo>
+                  <a:lnTo>
+                    <a:pt x="6087914" y="808416"/>
+                  </a:lnTo>
+                  <a:lnTo>
+                    <a:pt x="6016292" y="808346"/>
+                  </a:lnTo>
+                  <a:lnTo>
+                    <a:pt x="5944669" y="808262"/>
+                  </a:lnTo>
+                  <a:lnTo>
+                    <a:pt x="5873047" y="808160"/>
+                  </a:lnTo>
+                  <a:lnTo>
+                    <a:pt x="5801424" y="808037"/>
+                  </a:lnTo>
+                  <a:lnTo>
+                    <a:pt x="5729802" y="807888"/>
+                  </a:lnTo>
+                  <a:lnTo>
+                    <a:pt x="5658179" y="807708"/>
+                  </a:lnTo>
+                  <a:lnTo>
+                    <a:pt x="5586557" y="807490"/>
+                  </a:lnTo>
+                  <a:lnTo>
+                    <a:pt x="5514934" y="807226"/>
+                  </a:lnTo>
+                  <a:lnTo>
+                    <a:pt x="5443311" y="806907"/>
+                  </a:lnTo>
+                  <a:lnTo>
+                    <a:pt x="5371689" y="806521"/>
+                  </a:lnTo>
+                  <a:lnTo>
+                    <a:pt x="5300066" y="806055"/>
+                  </a:lnTo>
+                  <a:lnTo>
+                    <a:pt x="5228444" y="805491"/>
+                  </a:lnTo>
+                  <a:lnTo>
+                    <a:pt x="5156821" y="804809"/>
+                  </a:lnTo>
+                  <a:lnTo>
+                    <a:pt x="5085199" y="803984"/>
+                  </a:lnTo>
+                  <a:lnTo>
+                    <a:pt x="5013576" y="802986"/>
+                  </a:lnTo>
+                  <a:lnTo>
+                    <a:pt x="4941954" y="801779"/>
+                  </a:lnTo>
+                  <a:lnTo>
+                    <a:pt x="4870331" y="800319"/>
+                  </a:lnTo>
+                  <a:lnTo>
+                    <a:pt x="4798709" y="798554"/>
+                  </a:lnTo>
+                  <a:lnTo>
+                    <a:pt x="4727086" y="796418"/>
+                  </a:lnTo>
+                  <a:lnTo>
+                    <a:pt x="4655464" y="793836"/>
+                  </a:lnTo>
+                  <a:lnTo>
+                    <a:pt x="4583841" y="790713"/>
+                  </a:lnTo>
+                  <a:lnTo>
+                    <a:pt x="4512219" y="786935"/>
+                  </a:lnTo>
+                  <a:lnTo>
+                    <a:pt x="4440596" y="782367"/>
+                  </a:lnTo>
+                  <a:lnTo>
+                    <a:pt x="4368974" y="776842"/>
+                  </a:lnTo>
+                  <a:lnTo>
+                    <a:pt x="4297351" y="770159"/>
+                  </a:lnTo>
+                  <a:lnTo>
+                    <a:pt x="4225729" y="762077"/>
+                  </a:lnTo>
+                  <a:lnTo>
+                    <a:pt x="4154106" y="752302"/>
+                  </a:lnTo>
+                  <a:lnTo>
+                    <a:pt x="4082483" y="740480"/>
+                  </a:lnTo>
+                  <a:lnTo>
+                    <a:pt x="4010861" y="726182"/>
+                  </a:lnTo>
+                  <a:lnTo>
+                    <a:pt x="3939238" y="708889"/>
+                  </a:lnTo>
+                  <a:lnTo>
+                    <a:pt x="3867616" y="687975"/>
+                  </a:lnTo>
+                  <a:lnTo>
+                    <a:pt x="3795993" y="662680"/>
+                  </a:lnTo>
+                  <a:lnTo>
+                    <a:pt x="3724371" y="632087"/>
+                  </a:lnTo>
+                  <a:lnTo>
+                    <a:pt x="3652748" y="595087"/>
+                  </a:lnTo>
+                  <a:lnTo>
+                    <a:pt x="3581126" y="550338"/>
+                  </a:lnTo>
+                  <a:lnTo>
+                    <a:pt x="3509503" y="496217"/>
+                  </a:lnTo>
+                  <a:lnTo>
+                    <a:pt x="3437881" y="430761"/>
+                  </a:lnTo>
+                  <a:lnTo>
+                    <a:pt x="3366258" y="351596"/>
+                  </a:lnTo>
+                  <a:lnTo>
+                    <a:pt x="3294636" y="255850"/>
+                  </a:lnTo>
+                  <a:lnTo>
+                    <a:pt x="3223013" y="140051"/>
                   </a:lnTo>
                   <a:lnTo>
                     <a:pt x="3151391" y="0"/>
                   </a:lnTo>
                   <a:lnTo>
-                    <a:pt x="3079768" y="27061"/>
-                  </a:lnTo>
-                  <a:lnTo>
-                    <a:pt x="3008146" y="85207"/>
-                  </a:lnTo>
-                  <a:lnTo>
-                    <a:pt x="2936523" y="138994"/>
-                  </a:lnTo>
-                  <a:lnTo>
-                    <a:pt x="2864901" y="188747"/>
-                  </a:lnTo>
-                  <a:lnTo>
-                    <a:pt x="2793278" y="234770"/>
-                  </a:lnTo>
-                  <a:lnTo>
-                    <a:pt x="2721655" y="277342"/>
-                  </a:lnTo>
-                  <a:lnTo>
-                    <a:pt x="2650033" y="316722"/>
-                  </a:lnTo>
-                  <a:lnTo>
-                    <a:pt x="2578410" y="353150"/>
-                  </a:lnTo>
-                  <a:lnTo>
-                    <a:pt x="2506788" y="386846"/>
-                  </a:lnTo>
-                  <a:lnTo>
-                    <a:pt x="2435165" y="418015"/>
-                  </a:lnTo>
-                  <a:lnTo>
-                    <a:pt x="2363543" y="446847"/>
-                  </a:lnTo>
-                  <a:lnTo>
-                    <a:pt x="2291920" y="473517"/>
-                  </a:lnTo>
-                  <a:lnTo>
-                    <a:pt x="2220298" y="498188"/>
-                  </a:lnTo>
-                  <a:lnTo>
-                    <a:pt x="2148675" y="521008"/>
-                  </a:lnTo>
-                  <a:lnTo>
-                    <a:pt x="2077053" y="542118"/>
-                  </a:lnTo>
-                  <a:lnTo>
-                    <a:pt x="2005430" y="561645"/>
-                  </a:lnTo>
-                  <a:lnTo>
-                    <a:pt x="1933808" y="579707"/>
-                  </a:lnTo>
-                  <a:lnTo>
-                    <a:pt x="1862185" y="596415"/>
-                  </a:lnTo>
-                  <a:lnTo>
-                    <a:pt x="1790563" y="611871"/>
-                  </a:lnTo>
-                  <a:lnTo>
-                    <a:pt x="1718940" y="626167"/>
-                  </a:lnTo>
-                  <a:lnTo>
-                    <a:pt x="1647318" y="639392"/>
-                  </a:lnTo>
-                  <a:lnTo>
-                    <a:pt x="1575695" y="651625"/>
-                  </a:lnTo>
-                  <a:lnTo>
-                    <a:pt x="1504073" y="662941"/>
-                  </a:lnTo>
-                  <a:lnTo>
-                    <a:pt x="1432450" y="673408"/>
-                  </a:lnTo>
-                  <a:lnTo>
-                    <a:pt x="1360827" y="683090"/>
-                  </a:lnTo>
-                  <a:lnTo>
-                    <a:pt x="1289205" y="692047"/>
-                  </a:lnTo>
-                  <a:lnTo>
-                    <a:pt x="1217582" y="700331"/>
-                  </a:lnTo>
-                  <a:lnTo>
-                    <a:pt x="1145960" y="707995"/>
-                  </a:lnTo>
-                  <a:lnTo>
-                    <a:pt x="1074337" y="715084"/>
-                  </a:lnTo>
-                  <a:lnTo>
-                    <a:pt x="1002715" y="721641"/>
-                  </a:lnTo>
-                  <a:lnTo>
-                    <a:pt x="931092" y="727707"/>
-                  </a:lnTo>
-                  <a:lnTo>
-                    <a:pt x="859470" y="733318"/>
-                  </a:lnTo>
-                  <a:lnTo>
-                    <a:pt x="787847" y="738508"/>
-                  </a:lnTo>
-                  <a:lnTo>
-                    <a:pt x="716225" y="743309"/>
-                  </a:lnTo>
-                  <a:lnTo>
-                    <a:pt x="644602" y="747750"/>
-                  </a:lnTo>
-                  <a:lnTo>
-                    <a:pt x="572980" y="751859"/>
-                  </a:lnTo>
-                  <a:lnTo>
-                    <a:pt x="501357" y="755659"/>
-                  </a:lnTo>
-                  <a:lnTo>
-                    <a:pt x="429735" y="759174"/>
-                  </a:lnTo>
-                  <a:lnTo>
-                    <a:pt x="358112" y="762425"/>
-                  </a:lnTo>
-                  <a:lnTo>
-                    <a:pt x="286490" y="765433"/>
-                  </a:lnTo>
-                  <a:lnTo>
-                    <a:pt x="214867" y="768215"/>
-                  </a:lnTo>
-                  <a:lnTo>
-                    <a:pt x="143245" y="770789"/>
-                  </a:lnTo>
-                  <a:lnTo>
-                    <a:pt x="71622" y="773169"/>
-                  </a:lnTo>
-                  <a:lnTo>
-                    <a:pt x="0" y="775371"/>
+                    <a:pt x="3079768" y="4722"/>
+                  </a:lnTo>
+                  <a:lnTo>
+                    <a:pt x="3008146" y="33094"/>
+                  </a:lnTo>
+                  <a:lnTo>
+                    <a:pt x="2936523" y="60464"/>
+                  </a:lnTo>
+                  <a:lnTo>
+                    <a:pt x="2864901" y="86869"/>
+                  </a:lnTo>
+                  <a:lnTo>
+                    <a:pt x="2793278" y="112342"/>
+                  </a:lnTo>
+                  <a:lnTo>
+                    <a:pt x="2721655" y="136916"/>
+                  </a:lnTo>
+                  <a:lnTo>
+                    <a:pt x="2650033" y="160623"/>
+                  </a:lnTo>
+                  <a:lnTo>
+                    <a:pt x="2578410" y="183494"/>
+                  </a:lnTo>
+                  <a:lnTo>
+                    <a:pt x="2506788" y="205557"/>
+                  </a:lnTo>
+                  <a:lnTo>
+                    <a:pt x="2435165" y="226842"/>
+                  </a:lnTo>
+                  <a:lnTo>
+                    <a:pt x="2363543" y="247376"/>
+                  </a:lnTo>
+                  <a:lnTo>
+                    <a:pt x="2291920" y="267185"/>
+                  </a:lnTo>
+                  <a:lnTo>
+                    <a:pt x="2220298" y="286295"/>
+                  </a:lnTo>
+                  <a:lnTo>
+                    <a:pt x="2148675" y="304731"/>
+                  </a:lnTo>
+                  <a:lnTo>
+                    <a:pt x="2077053" y="322516"/>
+                  </a:lnTo>
+                  <a:lnTo>
+                    <a:pt x="2005430" y="339674"/>
+                  </a:lnTo>
+                  <a:lnTo>
+                    <a:pt x="1933808" y="356226"/>
+                  </a:lnTo>
+                  <a:lnTo>
+                    <a:pt x="1862185" y="372194"/>
+                  </a:lnTo>
+                  <a:lnTo>
+                    <a:pt x="1790563" y="387599"/>
+                  </a:lnTo>
+                  <a:lnTo>
+                    <a:pt x="1718940" y="402460"/>
+                  </a:lnTo>
+                  <a:lnTo>
+                    <a:pt x="1647318" y="416797"/>
+                  </a:lnTo>
+                  <a:lnTo>
+                    <a:pt x="1575695" y="430628"/>
+                  </a:lnTo>
+                  <a:lnTo>
+                    <a:pt x="1504073" y="443971"/>
+                  </a:lnTo>
+                  <a:lnTo>
+                    <a:pt x="1432450" y="456843"/>
+                  </a:lnTo>
+                  <a:lnTo>
+                    <a:pt x="1360827" y="469260"/>
+                  </a:lnTo>
+                  <a:lnTo>
+                    <a:pt x="1289205" y="481240"/>
+                  </a:lnTo>
+                  <a:lnTo>
+                    <a:pt x="1217582" y="492797"/>
+                  </a:lnTo>
+                  <a:lnTo>
+                    <a:pt x="1145960" y="503946"/>
+                  </a:lnTo>
+                  <a:lnTo>
+                    <a:pt x="1074337" y="514701"/>
+                  </a:lnTo>
+                  <a:lnTo>
+                    <a:pt x="1002715" y="525077"/>
+                  </a:lnTo>
+                  <a:lnTo>
+                    <a:pt x="931092" y="535087"/>
+                  </a:lnTo>
+                  <a:lnTo>
+                    <a:pt x="859470" y="544744"/>
+                  </a:lnTo>
+                  <a:lnTo>
+                    <a:pt x="787847" y="554060"/>
+                  </a:lnTo>
+                  <a:lnTo>
+                    <a:pt x="716225" y="563047"/>
+                  </a:lnTo>
+                  <a:lnTo>
+                    <a:pt x="644602" y="571717"/>
+                  </a:lnTo>
+                  <a:lnTo>
+                    <a:pt x="572980" y="580081"/>
+                  </a:lnTo>
+                  <a:lnTo>
+                    <a:pt x="501357" y="588150"/>
+                  </a:lnTo>
+                  <a:lnTo>
+                    <a:pt x="429735" y="595935"/>
+                  </a:lnTo>
+                  <a:lnTo>
+                    <a:pt x="358112" y="603444"/>
+                  </a:lnTo>
+                  <a:lnTo>
+                    <a:pt x="286490" y="610689"/>
+                  </a:lnTo>
+                  <a:lnTo>
+                    <a:pt x="214867" y="617678"/>
+                  </a:lnTo>
+                  <a:lnTo>
+                    <a:pt x="143245" y="624420"/>
+                  </a:lnTo>
+                  <a:lnTo>
+                    <a:pt x="71622" y="630924"/>
+                  </a:lnTo>
+                  <a:lnTo>
+                    <a:pt x="0" y="637199"/>
                   </a:lnTo>
                 </a:path>
               </a:pathLst>
@@ -4238,234 +4370,237 @@
           </p:nvSpPr>
           <p:spPr>
             <a:xfrm>
-              <a:off x="3058996" y="2073503"/>
-              <a:ext cx="5203683" cy="3474665"/>
+              <a:off x="2981593" y="2073503"/>
+              <a:ext cx="5281086" cy="3471934"/>
             </a:xfrm>
             <a:custGeom>
               <a:avLst/>
               <a:pathLst>
-                <a:path w="5203683" h="3474665">
+                <a:path w="5281086" h="3471934">
                   <a:moveTo>
                     <a:pt x="0" y="0"/>
                   </a:moveTo>
                   <a:lnTo>
-                    <a:pt x="46861" y="184201"/>
-                  </a:lnTo>
-                  <a:lnTo>
-                    <a:pt x="118483" y="443599"/>
-                  </a:lnTo>
-                  <a:lnTo>
-                    <a:pt x="190106" y="682604"/>
-                  </a:lnTo>
-                  <a:lnTo>
-                    <a:pt x="261728" y="902820"/>
-                  </a:lnTo>
-                  <a:lnTo>
-                    <a:pt x="333351" y="1105723"/>
-                  </a:lnTo>
-                  <a:lnTo>
-                    <a:pt x="404974" y="1292675"/>
-                  </a:lnTo>
-                  <a:lnTo>
-                    <a:pt x="476596" y="1464929"/>
-                  </a:lnTo>
-                  <a:lnTo>
-                    <a:pt x="548219" y="1623641"/>
-                  </a:lnTo>
-                  <a:lnTo>
-                    <a:pt x="619841" y="1769876"/>
-                  </a:lnTo>
-                  <a:lnTo>
-                    <a:pt x="691464" y="1904614"/>
-                  </a:lnTo>
-                  <a:lnTo>
-                    <a:pt x="763086" y="2028760"/>
-                  </a:lnTo>
-                  <a:lnTo>
-                    <a:pt x="834709" y="2143146"/>
-                  </a:lnTo>
-                  <a:lnTo>
-                    <a:pt x="906331" y="2248539"/>
-                  </a:lnTo>
-                  <a:lnTo>
-                    <a:pt x="977954" y="2345646"/>
-                  </a:lnTo>
-                  <a:lnTo>
-                    <a:pt x="1049576" y="2435120"/>
-                  </a:lnTo>
-                  <a:lnTo>
-                    <a:pt x="1121199" y="2517559"/>
-                  </a:lnTo>
-                  <a:lnTo>
-                    <a:pt x="1192821" y="2593517"/>
-                  </a:lnTo>
-                  <a:lnTo>
-                    <a:pt x="1264444" y="2663504"/>
-                  </a:lnTo>
-                  <a:lnTo>
-                    <a:pt x="1336066" y="2727988"/>
-                  </a:lnTo>
-                  <a:lnTo>
-                    <a:pt x="1407689" y="2787403"/>
-                  </a:lnTo>
-                  <a:lnTo>
-                    <a:pt x="1479311" y="2842147"/>
-                  </a:lnTo>
-                  <a:lnTo>
-                    <a:pt x="1550934" y="2892587"/>
-                  </a:lnTo>
-                  <a:lnTo>
-                    <a:pt x="1622556" y="2939062"/>
-                  </a:lnTo>
-                  <a:lnTo>
-                    <a:pt x="1694179" y="2981883"/>
-                  </a:lnTo>
-                  <a:lnTo>
-                    <a:pt x="1765802" y="3021338"/>
-                  </a:lnTo>
-                  <a:lnTo>
-                    <a:pt x="1837424" y="3057691"/>
-                  </a:lnTo>
-                  <a:lnTo>
-                    <a:pt x="1909047" y="3091186"/>
-                  </a:lnTo>
-                  <a:lnTo>
-                    <a:pt x="1980669" y="3122048"/>
-                  </a:lnTo>
-                  <a:lnTo>
-                    <a:pt x="2052292" y="3150483"/>
-                  </a:lnTo>
-                  <a:lnTo>
-                    <a:pt x="2123914" y="3176683"/>
-                  </a:lnTo>
-                  <a:lnTo>
-                    <a:pt x="2195537" y="3200823"/>
-                  </a:lnTo>
-                  <a:lnTo>
-                    <a:pt x="2267159" y="3223066"/>
-                  </a:lnTo>
-                  <a:lnTo>
-                    <a:pt x="2338782" y="3243559"/>
-                  </a:lnTo>
-                  <a:lnTo>
-                    <a:pt x="2410404" y="3262442"/>
-                  </a:lnTo>
-                  <a:lnTo>
-                    <a:pt x="2482027" y="3279840"/>
-                  </a:lnTo>
-                  <a:lnTo>
-                    <a:pt x="2553649" y="3295871"/>
-                  </a:lnTo>
-                  <a:lnTo>
-                    <a:pt x="2625272" y="3310641"/>
-                  </a:lnTo>
-                  <a:lnTo>
-                    <a:pt x="2696894" y="3324250"/>
-                  </a:lnTo>
-                  <a:lnTo>
-                    <a:pt x="2768517" y="3336789"/>
-                  </a:lnTo>
-                  <a:lnTo>
-                    <a:pt x="2840139" y="3348342"/>
-                  </a:lnTo>
-                  <a:lnTo>
-                    <a:pt x="2911762" y="3358987"/>
-                  </a:lnTo>
-                  <a:lnTo>
-                    <a:pt x="2983384" y="3368795"/>
-                  </a:lnTo>
-                  <a:lnTo>
-                    <a:pt x="3055007" y="3377832"/>
-                  </a:lnTo>
-                  <a:lnTo>
-                    <a:pt x="3126630" y="3386159"/>
-                  </a:lnTo>
-                  <a:lnTo>
-                    <a:pt x="3198252" y="3393831"/>
-                  </a:lnTo>
-                  <a:lnTo>
-                    <a:pt x="3269875" y="3400900"/>
-                  </a:lnTo>
-                  <a:lnTo>
-                    <a:pt x="3341497" y="3407413"/>
-                  </a:lnTo>
-                  <a:lnTo>
-                    <a:pt x="3413120" y="3413414"/>
-                  </a:lnTo>
-                  <a:lnTo>
-                    <a:pt x="3484742" y="3418943"/>
-                  </a:lnTo>
-                  <a:lnTo>
-                    <a:pt x="3556365" y="3424038"/>
-                  </a:lnTo>
-                  <a:lnTo>
-                    <a:pt x="3627987" y="3428732"/>
-                  </a:lnTo>
-                  <a:lnTo>
-                    <a:pt x="3699610" y="3433057"/>
-                  </a:lnTo>
-                  <a:lnTo>
-                    <a:pt x="3771232" y="3437042"/>
-                  </a:lnTo>
-                  <a:lnTo>
-                    <a:pt x="3842855" y="3440714"/>
-                  </a:lnTo>
-                  <a:lnTo>
-                    <a:pt x="3914477" y="3444097"/>
-                  </a:lnTo>
-                  <a:lnTo>
-                    <a:pt x="3986100" y="3447214"/>
-                  </a:lnTo>
-                  <a:lnTo>
-                    <a:pt x="4057722" y="3450086"/>
-                  </a:lnTo>
-                  <a:lnTo>
-                    <a:pt x="4129345" y="3452732"/>
-                  </a:lnTo>
-                  <a:lnTo>
-                    <a:pt x="4200967" y="3455170"/>
-                  </a:lnTo>
-                  <a:lnTo>
-                    <a:pt x="4272590" y="3457417"/>
-                  </a:lnTo>
-                  <a:lnTo>
-                    <a:pt x="4344212" y="3459487"/>
-                  </a:lnTo>
-                  <a:lnTo>
-                    <a:pt x="4415835" y="3461394"/>
-                  </a:lnTo>
-                  <a:lnTo>
-                    <a:pt x="4487458" y="3463151"/>
-                  </a:lnTo>
-                  <a:lnTo>
-                    <a:pt x="4559080" y="3464770"/>
-                  </a:lnTo>
-                  <a:lnTo>
-                    <a:pt x="4630703" y="3466262"/>
-                  </a:lnTo>
-                  <a:lnTo>
-                    <a:pt x="4702325" y="3467637"/>
-                  </a:lnTo>
-                  <a:lnTo>
-                    <a:pt x="4773948" y="3468903"/>
-                  </a:lnTo>
-                  <a:lnTo>
-                    <a:pt x="4845570" y="3470070"/>
-                  </a:lnTo>
-                  <a:lnTo>
-                    <a:pt x="4917193" y="3471145"/>
-                  </a:lnTo>
-                  <a:lnTo>
-                    <a:pt x="4988815" y="3472136"/>
-                  </a:lnTo>
-                  <a:lnTo>
-                    <a:pt x="5060438" y="3473049"/>
-                  </a:lnTo>
-                  <a:lnTo>
-                    <a:pt x="5132060" y="3473890"/>
-                  </a:lnTo>
-                  <a:lnTo>
-                    <a:pt x="5203683" y="3474665"/>
+                    <a:pt x="52641" y="193847"/>
+                  </a:lnTo>
+                  <a:lnTo>
+                    <a:pt x="124264" y="438016"/>
+                  </a:lnTo>
+                  <a:lnTo>
+                    <a:pt x="195886" y="664063"/>
+                  </a:lnTo>
+                  <a:lnTo>
+                    <a:pt x="267509" y="873333"/>
+                  </a:lnTo>
+                  <a:lnTo>
+                    <a:pt x="339131" y="1067071"/>
+                  </a:lnTo>
+                  <a:lnTo>
+                    <a:pt x="410754" y="1246431"/>
+                  </a:lnTo>
+                  <a:lnTo>
+                    <a:pt x="482376" y="1412479"/>
+                  </a:lnTo>
+                  <a:lnTo>
+                    <a:pt x="553999" y="1566204"/>
+                  </a:lnTo>
+                  <a:lnTo>
+                    <a:pt x="625621" y="1708519"/>
+                  </a:lnTo>
+                  <a:lnTo>
+                    <a:pt x="697244" y="1840273"/>
+                  </a:lnTo>
+                  <a:lnTo>
+                    <a:pt x="768866" y="1962247"/>
+                  </a:lnTo>
+                  <a:lnTo>
+                    <a:pt x="840489" y="2075169"/>
+                  </a:lnTo>
+                  <a:lnTo>
+                    <a:pt x="912111" y="2179711"/>
+                  </a:lnTo>
+                  <a:lnTo>
+                    <a:pt x="983734" y="2276493"/>
+                  </a:lnTo>
+                  <a:lnTo>
+                    <a:pt x="1055357" y="2366092"/>
+                  </a:lnTo>
+                  <a:lnTo>
+                    <a:pt x="1126979" y="2449042"/>
+                  </a:lnTo>
+                  <a:lnTo>
+                    <a:pt x="1198602" y="2525835"/>
+                  </a:lnTo>
+                  <a:lnTo>
+                    <a:pt x="1270224" y="2596929"/>
+                  </a:lnTo>
+                  <a:lnTo>
+                    <a:pt x="1341847" y="2662747"/>
+                  </a:lnTo>
+                  <a:lnTo>
+                    <a:pt x="1413469" y="2723679"/>
+                  </a:lnTo>
+                  <a:lnTo>
+                    <a:pt x="1485092" y="2780090"/>
+                  </a:lnTo>
+                  <a:lnTo>
+                    <a:pt x="1556714" y="2832313"/>
+                  </a:lnTo>
+                  <a:lnTo>
+                    <a:pt x="1628337" y="2880661"/>
+                  </a:lnTo>
+                  <a:lnTo>
+                    <a:pt x="1699959" y="2925421"/>
+                  </a:lnTo>
+                  <a:lnTo>
+                    <a:pt x="1771582" y="2966858"/>
+                  </a:lnTo>
+                  <a:lnTo>
+                    <a:pt x="1843204" y="3005221"/>
+                  </a:lnTo>
+                  <a:lnTo>
+                    <a:pt x="1914827" y="3040736"/>
+                  </a:lnTo>
+                  <a:lnTo>
+                    <a:pt x="1986449" y="3073615"/>
+                  </a:lnTo>
+                  <a:lnTo>
+                    <a:pt x="2058072" y="3104054"/>
+                  </a:lnTo>
+                  <a:lnTo>
+                    <a:pt x="2129694" y="3132234"/>
+                  </a:lnTo>
+                  <a:lnTo>
+                    <a:pt x="2201317" y="3158322"/>
+                  </a:lnTo>
+                  <a:lnTo>
+                    <a:pt x="2272939" y="3182474"/>
+                  </a:lnTo>
+                  <a:lnTo>
+                    <a:pt x="2344562" y="3204834"/>
+                  </a:lnTo>
+                  <a:lnTo>
+                    <a:pt x="2416185" y="3225534"/>
+                  </a:lnTo>
+                  <a:lnTo>
+                    <a:pt x="2487807" y="3244698"/>
+                  </a:lnTo>
+                  <a:lnTo>
+                    <a:pt x="2559430" y="3262440"/>
+                  </a:lnTo>
+                  <a:lnTo>
+                    <a:pt x="2631052" y="3278865"/>
+                  </a:lnTo>
+                  <a:lnTo>
+                    <a:pt x="2702675" y="3294070"/>
+                  </a:lnTo>
+                  <a:lnTo>
+                    <a:pt x="2774297" y="3308148"/>
+                  </a:lnTo>
+                  <a:lnTo>
+                    <a:pt x="2845920" y="3321180"/>
+                  </a:lnTo>
+                  <a:lnTo>
+                    <a:pt x="2917542" y="3333246"/>
+                  </a:lnTo>
+                  <a:lnTo>
+                    <a:pt x="2989165" y="3344415"/>
+                  </a:lnTo>
+                  <a:lnTo>
+                    <a:pt x="3060787" y="3354756"/>
+                  </a:lnTo>
+                  <a:lnTo>
+                    <a:pt x="3132410" y="3364329"/>
+                  </a:lnTo>
+                  <a:lnTo>
+                    <a:pt x="3204032" y="3373192"/>
+                  </a:lnTo>
+                  <a:lnTo>
+                    <a:pt x="3275655" y="3381397"/>
+                  </a:lnTo>
+                  <a:lnTo>
+                    <a:pt x="3347277" y="3388993"/>
+                  </a:lnTo>
+                  <a:lnTo>
+                    <a:pt x="3418900" y="3396026"/>
+                  </a:lnTo>
+                  <a:lnTo>
+                    <a:pt x="3490522" y="3402536"/>
+                  </a:lnTo>
+                  <a:lnTo>
+                    <a:pt x="3562145" y="3408563"/>
+                  </a:lnTo>
+                  <a:lnTo>
+                    <a:pt x="3633767" y="3414143"/>
+                  </a:lnTo>
+                  <a:lnTo>
+                    <a:pt x="3705390" y="3419309"/>
+                  </a:lnTo>
+                  <a:lnTo>
+                    <a:pt x="3777013" y="3424092"/>
+                  </a:lnTo>
+                  <a:lnTo>
+                    <a:pt x="3848635" y="3428519"/>
+                  </a:lnTo>
+                  <a:lnTo>
+                    <a:pt x="3920258" y="3432618"/>
+                  </a:lnTo>
+                  <a:lnTo>
+                    <a:pt x="3991880" y="3436412"/>
+                  </a:lnTo>
+                  <a:lnTo>
+                    <a:pt x="4063503" y="3439925"/>
+                  </a:lnTo>
+                  <a:lnTo>
+                    <a:pt x="4135125" y="3443178"/>
+                  </a:lnTo>
+                  <a:lnTo>
+                    <a:pt x="4206748" y="3446189"/>
+                  </a:lnTo>
+                  <a:lnTo>
+                    <a:pt x="4278370" y="3448976"/>
+                  </a:lnTo>
+                  <a:lnTo>
+                    <a:pt x="4349993" y="3451557"/>
+                  </a:lnTo>
+                  <a:lnTo>
+                    <a:pt x="4421615" y="3453946"/>
+                  </a:lnTo>
+                  <a:lnTo>
+                    <a:pt x="4493238" y="3456157"/>
+                  </a:lnTo>
+                  <a:lnTo>
+                    <a:pt x="4564860" y="3458205"/>
+                  </a:lnTo>
+                  <a:lnTo>
+                    <a:pt x="4636483" y="3460101"/>
+                  </a:lnTo>
+                  <a:lnTo>
+                    <a:pt x="4708105" y="3461856"/>
+                  </a:lnTo>
+                  <a:lnTo>
+                    <a:pt x="4779728" y="3463480"/>
+                  </a:lnTo>
+                  <a:lnTo>
+                    <a:pt x="4851350" y="3464984"/>
+                  </a:lnTo>
+                  <a:lnTo>
+                    <a:pt x="4922973" y="3466377"/>
+                  </a:lnTo>
+                  <a:lnTo>
+                    <a:pt x="4994595" y="3467666"/>
+                  </a:lnTo>
+                  <a:lnTo>
+                    <a:pt x="5066218" y="3468859"/>
+                  </a:lnTo>
+                  <a:lnTo>
+                    <a:pt x="5137841" y="3469964"/>
+                  </a:lnTo>
+                  <a:lnTo>
+                    <a:pt x="5209463" y="3470987"/>
+                  </a:lnTo>
+                  <a:lnTo>
+                    <a:pt x="5281086" y="3471934"/>
                   </a:lnTo>
                 </a:path>
               </a:pathLst>
@@ -4537,7 +4672,7 @@
           </p:nvSpPr>
           <p:spPr>
             <a:xfrm>
-              <a:off x="4313661" y="2073503"/>
+              <a:off x="4313914" y="2073503"/>
               <a:ext cx="0" cy="3649639"/>
             </a:xfrm>
             <a:custGeom>
@@ -4810,7 +4945,7 @@
           </p:nvSpPr>
           <p:spPr>
             <a:xfrm>
-              <a:off x="1343342" y="5785772"/>
+              <a:off x="1344940" y="5785772"/>
               <a:ext cx="161574" cy="80101"/>
             </a:xfrm>
             <a:prstGeom prst="rect">
@@ -4856,7 +4991,7 @@
           </p:nvSpPr>
           <p:spPr>
             <a:xfrm>
-              <a:off x="2280620" y="5785772"/>
+              <a:off x="2281218" y="5785772"/>
               <a:ext cx="161574" cy="80101"/>
             </a:xfrm>
             <a:prstGeom prst="rect">
@@ -4902,7 +5037,7 @@
           </p:nvSpPr>
           <p:spPr>
             <a:xfrm>
-              <a:off x="3217897" y="5785772"/>
+              <a:off x="3217496" y="5785772"/>
               <a:ext cx="161574" cy="80101"/>
             </a:xfrm>
             <a:prstGeom prst="rect">
@@ -4948,7 +5083,7 @@
           </p:nvSpPr>
           <p:spPr>
             <a:xfrm>
-              <a:off x="4204872" y="5785772"/>
+              <a:off x="4203472" y="5785772"/>
               <a:ext cx="62179" cy="80101"/>
             </a:xfrm>
             <a:prstGeom prst="rect">
@@ -4994,7 +5129,7 @@
           </p:nvSpPr>
           <p:spPr>
             <a:xfrm>
-              <a:off x="5111060" y="5785772"/>
+              <a:off x="5108660" y="5785772"/>
               <a:ext cx="124358" cy="80101"/>
             </a:xfrm>
             <a:prstGeom prst="rect">
@@ -5040,7 +5175,7 @@
           </p:nvSpPr>
           <p:spPr>
             <a:xfrm>
-              <a:off x="6048338" y="5785772"/>
+              <a:off x="6044938" y="5785772"/>
               <a:ext cx="124358" cy="80101"/>
             </a:xfrm>
             <a:prstGeom prst="rect">
@@ -5086,7 +5221,7 @@
           </p:nvSpPr>
           <p:spPr>
             <a:xfrm>
-              <a:off x="6985615" y="5785772"/>
+              <a:off x="6981216" y="5785772"/>
               <a:ext cx="124358" cy="80101"/>
             </a:xfrm>
             <a:prstGeom prst="rect">
@@ -5132,7 +5267,7 @@
           </p:nvSpPr>
           <p:spPr>
             <a:xfrm>
-              <a:off x="7922893" y="5785772"/>
+              <a:off x="7917494" y="5785772"/>
               <a:ext cx="124358" cy="80101"/>
             </a:xfrm>
             <a:prstGeom prst="rect">
@@ -5271,7 +5406,7 @@
           <p:spPr>
             <a:xfrm>
               <a:off x="817517" y="1896563"/>
-              <a:ext cx="6639366" cy="82021"/>
+              <a:ext cx="6575816" cy="82021"/>
             </a:xfrm>
             <a:prstGeom prst="rect">
               <a:avLst/>
@@ -5303,7 +5438,7 @@
                   <a:latin typeface="Helvetica"/>
                   <a:cs typeface="Helvetica"/>
                 </a:rPr>
-                <a:t>subHR per 10 % decline: 2.92 (0.36-23.64), p = 0.315  |  per IQR decline (Δ = 25.8 %): 15.93 (0.07-3538.98)  |  IQR: [-10.7, 15.1] %</a:t>
+                <a:t>subHR per 10 % decline: 2.74 (0.63-12.01), p = 0.181  |  per IQR decline (Δ = 25.8 %): 13.48 (0.30-610.81)  |  IQR: [-10.6, 15.2] %</a:t>
               </a:r>
             </a:p>
           </p:txBody>
